--- a/assets/pptx/catalog-498.pptx
+++ b/assets/pptx/catalog-498.pptx
@@ -3304,7 +3304,7 @@
                 <a:ea typeface="Ebrima"/>
                 <a:cs typeface="Ebrima"/>
               </a:rPr>
-              <a:t>የማምልከው አምላክ ከዚህ ሁሉ በላይ ነው (2x)</a:t>
+              <a:t>የማምልከው አምላክ ከዚህ ሁሉ በላይ ነው 2x</a:t>
             </a:r>
           </a:p>
         </p:txBody>
@@ -3371,7 +3371,7 @@
                 <a:ea typeface="Ebrima"/>
                 <a:cs typeface="Ebrima"/>
               </a:rPr>
-              <a:t>በላይ በላይ በላይ በላይ (4x)</a:t>
+              <a:t>በላይ በላይ በላይ በላይ 4x</a:t>
             </a:r>
           </a:p>
         </p:txBody>
@@ -3456,7 +3456,7 @@
                 <a:ea typeface="Ebrima"/>
                 <a:cs typeface="Ebrima"/>
               </a:rPr>
-              <a:t>አውጃለሁ ዛሬ አምላክነቱን (4x)</a:t>
+              <a:t>አውጃለሁ ዛሬ አምላክነቱን 4x</a:t>
             </a:r>
           </a:p>
           <a:p>
@@ -3510,7 +3510,7 @@
                 <a:ea typeface="Ebrima"/>
                 <a:cs typeface="Ebrima"/>
               </a:rPr>
-              <a:t>ትልቅ ነህ ትልቅ ነህ (2x)</a:t>
+              <a:t>ትልቅ ነህ ትልቅ ነህ 2x</a:t>
             </a:r>
           </a:p>
         </p:txBody>
@@ -3631,7 +3631,7 @@
                 <a:ea typeface="Ebrima"/>
                 <a:cs typeface="Ebrima"/>
               </a:rPr>
-              <a:t>ጌታ ነው ጌታ ከሚመስለው በላይ (2x)</a:t>
+              <a:t>ጌታ ነው ጌታ ከሚመስለው በላይ 2x</a:t>
             </a:r>
           </a:p>
         </p:txBody>
@@ -3752,7 +3752,7 @@
                 <a:ea typeface="Ebrima"/>
                 <a:cs typeface="Ebrima"/>
               </a:rPr>
-              <a:t>የማምልከው አምላክ ከዚህ ሁሉ በላይ ነው (2x)</a:t>
+              <a:t>የማምልከው አምላክ ከዚህ ሁሉ በላይ ነው 2x</a:t>
             </a:r>
           </a:p>
         </p:txBody>
@@ -3819,7 +3819,7 @@
                 <a:ea typeface="Ebrima"/>
                 <a:cs typeface="Ebrima"/>
               </a:rPr>
-              <a:t>በላይ በላይ በላይ በላይ (4x)</a:t>
+              <a:t>በላይ በላይ በላይ በላይ 4x</a:t>
             </a:r>
           </a:p>
         </p:txBody>
@@ -4007,7 +4007,7 @@
                 <a:ea typeface="Ebrima"/>
                 <a:cs typeface="Ebrima"/>
               </a:rPr>
-              <a:t>አውጃለሁ ዛሬ አምላክነቱን (4x)</a:t>
+              <a:t>አውጃለሁ ዛሬ አምላክነቱን 4x</a:t>
             </a:r>
           </a:p>
         </p:txBody>
@@ -4231,7 +4231,7 @@
                 <a:ea typeface="Ebrima"/>
                 <a:cs typeface="Ebrima"/>
               </a:rPr>
-              <a:t>ጌታ ነው ጌታ ከሚመስለው በላይ (2x)</a:t>
+              <a:t>ጌታ ነው ጌታ ከሚመስለው በላይ 2x</a:t>
             </a:r>
           </a:p>
         </p:txBody>
